--- a/docs/functions_and_arguments.pptx
+++ b/docs/functions_and_arguments.pptx
@@ -272,7 +272,7 @@
           <a:p>
             <a:fld id="{A32AF175-EFA6-4831-8A62-20D923136DD7}" type="datetimeFigureOut">
               <a:rPr lang="en-DE" smtClean="0"/>
-              <a:t>05/02/2026</a:t>
+              <a:t>26/02/2026</a:t>
             </a:fld>
             <a:endParaRPr lang="en-DE"/>
           </a:p>
@@ -472,7 +472,7 @@
           <a:p>
             <a:fld id="{A32AF175-EFA6-4831-8A62-20D923136DD7}" type="datetimeFigureOut">
               <a:rPr lang="en-DE" smtClean="0"/>
-              <a:t>05/02/2026</a:t>
+              <a:t>26/02/2026</a:t>
             </a:fld>
             <a:endParaRPr lang="en-DE"/>
           </a:p>
@@ -682,7 +682,7 @@
           <a:p>
             <a:fld id="{A32AF175-EFA6-4831-8A62-20D923136DD7}" type="datetimeFigureOut">
               <a:rPr lang="en-DE" smtClean="0"/>
-              <a:t>05/02/2026</a:t>
+              <a:t>26/02/2026</a:t>
             </a:fld>
             <a:endParaRPr lang="en-DE"/>
           </a:p>
@@ -882,7 +882,7 @@
           <a:p>
             <a:fld id="{A32AF175-EFA6-4831-8A62-20D923136DD7}" type="datetimeFigureOut">
               <a:rPr lang="en-DE" smtClean="0"/>
-              <a:t>05/02/2026</a:t>
+              <a:t>26/02/2026</a:t>
             </a:fld>
             <a:endParaRPr lang="en-DE"/>
           </a:p>
@@ -1158,7 +1158,7 @@
           <a:p>
             <a:fld id="{A32AF175-EFA6-4831-8A62-20D923136DD7}" type="datetimeFigureOut">
               <a:rPr lang="en-DE" smtClean="0"/>
-              <a:t>05/02/2026</a:t>
+              <a:t>26/02/2026</a:t>
             </a:fld>
             <a:endParaRPr lang="en-DE"/>
           </a:p>
@@ -1426,7 +1426,7 @@
           <a:p>
             <a:fld id="{A32AF175-EFA6-4831-8A62-20D923136DD7}" type="datetimeFigureOut">
               <a:rPr lang="en-DE" smtClean="0"/>
-              <a:t>05/02/2026</a:t>
+              <a:t>26/02/2026</a:t>
             </a:fld>
             <a:endParaRPr lang="en-DE"/>
           </a:p>
@@ -1841,7 +1841,7 @@
           <a:p>
             <a:fld id="{A32AF175-EFA6-4831-8A62-20D923136DD7}" type="datetimeFigureOut">
               <a:rPr lang="en-DE" smtClean="0"/>
-              <a:t>05/02/2026</a:t>
+              <a:t>26/02/2026</a:t>
             </a:fld>
             <a:endParaRPr lang="en-DE"/>
           </a:p>
@@ -1983,7 +1983,7 @@
           <a:p>
             <a:fld id="{A32AF175-EFA6-4831-8A62-20D923136DD7}" type="datetimeFigureOut">
               <a:rPr lang="en-DE" smtClean="0"/>
-              <a:t>05/02/2026</a:t>
+              <a:t>26/02/2026</a:t>
             </a:fld>
             <a:endParaRPr lang="en-DE"/>
           </a:p>
@@ -2096,7 +2096,7 @@
           <a:p>
             <a:fld id="{A32AF175-EFA6-4831-8A62-20D923136DD7}" type="datetimeFigureOut">
               <a:rPr lang="en-DE" smtClean="0"/>
-              <a:t>05/02/2026</a:t>
+              <a:t>26/02/2026</a:t>
             </a:fld>
             <a:endParaRPr lang="en-DE"/>
           </a:p>
@@ -2409,7 +2409,7 @@
           <a:p>
             <a:fld id="{A32AF175-EFA6-4831-8A62-20D923136DD7}" type="datetimeFigureOut">
               <a:rPr lang="en-DE" smtClean="0"/>
-              <a:t>05/02/2026</a:t>
+              <a:t>26/02/2026</a:t>
             </a:fld>
             <a:endParaRPr lang="en-DE"/>
           </a:p>
@@ -2698,7 +2698,7 @@
           <a:p>
             <a:fld id="{A32AF175-EFA6-4831-8A62-20D923136DD7}" type="datetimeFigureOut">
               <a:rPr lang="en-DE" smtClean="0"/>
-              <a:t>05/02/2026</a:t>
+              <a:t>26/02/2026</a:t>
             </a:fld>
             <a:endParaRPr lang="en-DE"/>
           </a:p>
@@ -2941,7 +2941,7 @@
           <a:p>
             <a:fld id="{A32AF175-EFA6-4831-8A62-20D923136DD7}" type="datetimeFigureOut">
               <a:rPr lang="en-DE" smtClean="0"/>
-              <a:t>05/02/2026</a:t>
+              <a:t>26/02/2026</a:t>
             </a:fld>
             <a:endParaRPr lang="en-DE"/>
           </a:p>
@@ -3373,25 +3373,25 @@
           <p:nvPr>
             <p:extLst>
               <p:ext uri="{D42A27DB-BD31-4B8C-83A1-F6EECF244321}">
-                <p14:modId xmlns:p14="http://schemas.microsoft.com/office/powerpoint/2010/main" val="4247424562"/>
+                <p14:modId xmlns:p14="http://schemas.microsoft.com/office/powerpoint/2010/main" val="3877047600"/>
               </p:ext>
             </p:extLst>
           </p:nvPr>
         </p:nvGraphicFramePr>
         <p:xfrm>
-          <a:off x="70639" y="336886"/>
-          <a:ext cx="12050722" cy="6184229"/>
+          <a:off x="511175" y="128589"/>
+          <a:ext cx="11045285" cy="6647342"/>
         </p:xfrm>
         <a:graphic>
           <a:graphicData uri="http://schemas.openxmlformats.org/presentationml/2006/ole">
             <mc:AlternateContent xmlns:mc="http://schemas.openxmlformats.org/markup-compatibility/2006">
               <mc:Choice xmlns:v="urn:schemas-microsoft-com:vml" Requires="v">
-                <p:oleObj name="Worksheet" r:id="rId2" imgW="9874090" imgH="5067164" progId="Excel.Sheet.12">
+                <p:oleObj name="Worksheet" r:id="rId2" imgW="9401115" imgH="5657763" progId="Excel.Sheet.12">
                   <p:embed/>
                 </p:oleObj>
               </mc:Choice>
               <mc:Fallback>
-                <p:oleObj name="Worksheet" r:id="rId2" imgW="9874090" imgH="5067164" progId="Excel.Sheet.12">
+                <p:oleObj name="Worksheet" r:id="rId2" imgW="9401115" imgH="5657763" progId="Excel.Sheet.12">
                   <p:embed/>
                   <p:pic>
                     <p:nvPicPr>
@@ -3407,8 +3407,8 @@
                     </p:blipFill>
                     <p:spPr>
                       <a:xfrm>
-                        <a:off x="70639" y="336886"/>
-                        <a:ext cx="12050722" cy="6184229"/>
+                        <a:off x="511175" y="128589"/>
+                        <a:ext cx="11045285" cy="6647342"/>
                       </a:xfrm>
                       <a:prstGeom prst="rect">
                         <a:avLst/>
@@ -3418,6 +3418,200 @@
                 </p:oleObj>
               </mc:Fallback>
             </mc:AlternateContent>
+          </a:graphicData>
+        </a:graphic>
+      </p:graphicFrame>
+      <p:graphicFrame>
+        <p:nvGraphicFramePr>
+          <p:cNvPr id="3" name="Table 2">
+            <a:extLst>
+              <a:ext uri="{FF2B5EF4-FFF2-40B4-BE49-F238E27FC236}">
+                <a16:creationId xmlns:a16="http://schemas.microsoft.com/office/drawing/2014/main" id="{5F710793-3471-145C-FE5F-B297A399BA90}"/>
+              </a:ext>
+            </a:extLst>
+          </p:cNvPr>
+          <p:cNvGraphicFramePr>
+            <a:graphicFrameLocks noGrp="1"/>
+          </p:cNvGraphicFramePr>
+          <p:nvPr>
+            <p:extLst>
+              <p:ext uri="{D42A27DB-BD31-4B8C-83A1-F6EECF244321}">
+                <p14:modId xmlns:p14="http://schemas.microsoft.com/office/powerpoint/2010/main" val="2771108995"/>
+              </p:ext>
+            </p:extLst>
+          </p:nvPr>
+        </p:nvGraphicFramePr>
+        <p:xfrm>
+          <a:off x="703094" y="1220586"/>
+          <a:ext cx="284162" cy="436245"/>
+        </p:xfrm>
+        <a:graphic>
+          <a:graphicData uri="http://schemas.openxmlformats.org/drawingml/2006/table">
+            <a:tbl>
+              <a:tblPr>
+                <a:tableStyleId>{5C22544A-7EE6-4342-B048-85BDC9FD1C3A}</a:tableStyleId>
+              </a:tblPr>
+              <a:tblGrid>
+                <a:gridCol w="284162">
+                  <a:extLst>
+                    <a:ext uri="{9D8B030D-6E8A-4147-A177-3AD203B41FA5}">
+                      <a16:colId xmlns:a16="http://schemas.microsoft.com/office/drawing/2014/main" val="2080744485"/>
+                    </a:ext>
+                  </a:extLst>
+                </a:gridCol>
+              </a:tblGrid>
+              <a:tr h="228600">
+                <a:tc>
+                  <a:txBody>
+                    <a:bodyPr/>
+                    <a:lstStyle/>
+                    <a:p>
+                      <a:pPr algn="ctr" fontAlgn="ctr">
+                        <a:buNone/>
+                      </a:pPr>
+                      <a:r>
+                        <a:rPr lang="en-DE" sz="2800" u="none" strike="noStrike" dirty="0">
+                          <a:solidFill>
+                            <a:srgbClr val="1E3283"/>
+                          </a:solidFill>
+                          <a:effectLst/>
+                        </a:rPr>
+                        <a:t>•</a:t>
+                      </a:r>
+                      <a:endParaRPr lang="en-DE" sz="2800" b="1" i="0" u="none" strike="noStrike" dirty="0">
+                        <a:solidFill>
+                          <a:srgbClr val="1E3283"/>
+                        </a:solidFill>
+                        <a:effectLst/>
+                        <a:latin typeface="Arial" panose="020B0604020202020204" pitchFamily="34" charset="0"/>
+                      </a:endParaRPr>
+                    </a:p>
+                  </a:txBody>
+                  <a:tcPr marL="9525" marR="9525" marT="9525" marB="0" anchor="ctr">
+                    <a:lnL w="12700" cmpd="sng">
+                      <a:noFill/>
+                    </a:lnL>
+                    <a:lnR w="12700" cmpd="sng">
+                      <a:noFill/>
+                    </a:lnR>
+                    <a:lnT w="12700" cmpd="sng">
+                      <a:noFill/>
+                    </a:lnT>
+                    <a:lnB w="12700" cmpd="sng">
+                      <a:noFill/>
+                    </a:lnB>
+                    <a:lnTlToBr w="12700" cmpd="sng">
+                      <a:noFill/>
+                      <a:prstDash val="solid"/>
+                    </a:lnTlToBr>
+                    <a:lnBlToTr w="12700" cmpd="sng">
+                      <a:noFill/>
+                      <a:prstDash val="solid"/>
+                    </a:lnBlToTr>
+                    <a:noFill/>
+                  </a:tcPr>
+                </a:tc>
+                <a:extLst>
+                  <a:ext uri="{0D108BD9-81ED-4DB2-BD59-A6C34878D82A}">
+                    <a16:rowId xmlns:a16="http://schemas.microsoft.com/office/drawing/2014/main" val="1658275772"/>
+                  </a:ext>
+                </a:extLst>
+              </a:tr>
+            </a:tbl>
+          </a:graphicData>
+        </a:graphic>
+      </p:graphicFrame>
+      <p:graphicFrame>
+        <p:nvGraphicFramePr>
+          <p:cNvPr id="4" name="Table 3">
+            <a:extLst>
+              <a:ext uri="{FF2B5EF4-FFF2-40B4-BE49-F238E27FC236}">
+                <a16:creationId xmlns:a16="http://schemas.microsoft.com/office/drawing/2014/main" id="{5432F459-B7F3-C5FE-05AB-7E1F3EAC19AB}"/>
+              </a:ext>
+            </a:extLst>
+          </p:cNvPr>
+          <p:cNvGraphicFramePr>
+            <a:graphicFrameLocks noGrp="1"/>
+          </p:cNvGraphicFramePr>
+          <p:nvPr>
+            <p:extLst>
+              <p:ext uri="{D42A27DB-BD31-4B8C-83A1-F6EECF244321}">
+                <p14:modId xmlns:p14="http://schemas.microsoft.com/office/powerpoint/2010/main" val="3301241057"/>
+              </p:ext>
+            </p:extLst>
+          </p:nvPr>
+        </p:nvGraphicFramePr>
+        <p:xfrm>
+          <a:off x="703094" y="1458163"/>
+          <a:ext cx="284162" cy="344805"/>
+        </p:xfrm>
+        <a:graphic>
+          <a:graphicData uri="http://schemas.openxmlformats.org/drawingml/2006/table">
+            <a:tbl>
+              <a:tblPr>
+                <a:tableStyleId>{5C22544A-7EE6-4342-B048-85BDC9FD1C3A}</a:tableStyleId>
+              </a:tblPr>
+              <a:tblGrid>
+                <a:gridCol w="284162">
+                  <a:extLst>
+                    <a:ext uri="{9D8B030D-6E8A-4147-A177-3AD203B41FA5}">
+                      <a16:colId xmlns:a16="http://schemas.microsoft.com/office/drawing/2014/main" val="2080744485"/>
+                    </a:ext>
+                  </a:extLst>
+                </a:gridCol>
+              </a:tblGrid>
+              <a:tr h="228600">
+                <a:tc>
+                  <a:txBody>
+                    <a:bodyPr/>
+                    <a:lstStyle/>
+                    <a:p>
+                      <a:pPr algn="ctr" fontAlgn="ctr">
+                        <a:buNone/>
+                      </a:pPr>
+                      <a:r>
+                        <a:rPr lang="en-DE" sz="2200" b="1" i="0" u="none" strike="noStrike" dirty="0">
+                          <a:solidFill>
+                            <a:srgbClr val="1E3283"/>
+                          </a:solidFill>
+                          <a:effectLst/>
+                          <a:latin typeface="Arial" panose="020B0604020202020204" pitchFamily="34" charset="0"/>
+                        </a:rPr>
+                        <a:t>○</a:t>
+                      </a:r>
+                    </a:p>
+                  </a:txBody>
+                  <a:tcPr marL="9525" marR="9525" marT="9525" marB="0" anchor="ctr">
+                    <a:lnL w="12700" cmpd="sng">
+                      <a:noFill/>
+                    </a:lnL>
+                    <a:lnR w="12700" cmpd="sng">
+                      <a:noFill/>
+                    </a:lnR>
+                    <a:lnT w="12700" cmpd="sng">
+                      <a:noFill/>
+                    </a:lnT>
+                    <a:lnB w="12700" cmpd="sng">
+                      <a:noFill/>
+                    </a:lnB>
+                    <a:lnTlToBr w="12700" cmpd="sng">
+                      <a:noFill/>
+                      <a:prstDash val="solid"/>
+                    </a:lnTlToBr>
+                    <a:lnBlToTr w="12700" cmpd="sng">
+                      <a:noFill/>
+                      <a:prstDash val="solid"/>
+                    </a:lnBlToTr>
+                    <a:noFill/>
+                  </a:tcPr>
+                </a:tc>
+                <a:extLst>
+                  <a:ext uri="{0D108BD9-81ED-4DB2-BD59-A6C34878D82A}">
+                    <a16:rowId xmlns:a16="http://schemas.microsoft.com/office/drawing/2014/main" val="1658275772"/>
+                  </a:ext>
+                </a:extLst>
+              </a:tr>
+            </a:tbl>
           </a:graphicData>
         </a:graphic>
       </p:graphicFrame>
